--- a/Presentation.pptx
+++ b/Presentation.pptx
@@ -7,19 +7,20 @@
     <p:sldMasterId id="2147483697" r:id="rId6"/>
   </p:sldMasterIdLst>
   <p:notesMasterIdLst>
-    <p:notesMasterId r:id="rId14"/>
+    <p:notesMasterId r:id="rId15"/>
   </p:notesMasterIdLst>
   <p:handoutMasterIdLst>
-    <p:handoutMasterId r:id="rId15"/>
+    <p:handoutMasterId r:id="rId16"/>
   </p:handoutMasterIdLst>
   <p:sldIdLst>
     <p:sldId id="256" r:id="rId7"/>
-    <p:sldId id="263" r:id="rId8"/>
-    <p:sldId id="265" r:id="rId9"/>
-    <p:sldId id="259" r:id="rId10"/>
-    <p:sldId id="257" r:id="rId11"/>
-    <p:sldId id="266" r:id="rId12"/>
-    <p:sldId id="262" r:id="rId13"/>
+    <p:sldId id="267" r:id="rId8"/>
+    <p:sldId id="263" r:id="rId9"/>
+    <p:sldId id="265" r:id="rId10"/>
+    <p:sldId id="259" r:id="rId11"/>
+    <p:sldId id="257" r:id="rId12"/>
+    <p:sldId id="266" r:id="rId13"/>
+    <p:sldId id="262" r:id="rId14"/>
   </p:sldIdLst>
   <p:sldSz cx="12192000" cy="6858000"/>
   <p:notesSz cx="6858000" cy="9144000"/>
@@ -141,7 +142,7 @@
 <file path=ppt/revisionInfo.xml><?xml version="1.0" encoding="utf-8"?>
 <p1510:revInfo xmlns:a="http://schemas.openxmlformats.org/drawingml/2006/main" xmlns:r="http://schemas.openxmlformats.org/officeDocument/2006/relationships" xmlns:p1510="http://schemas.microsoft.com/office/powerpoint/2015/10/main">
   <p1510:revLst>
-    <p1510:client id="{FB97335C-5688-4E6B-B7AD-96509F3105A0}" v="34" dt="2026-03-23T14:09:33.482"/>
+    <p1510:client id="{FB97335C-5688-4E6B-B7AD-96509F3105A0}" v="39" dt="2026-03-24T08:22:05.813"/>
   </p1510:revLst>
 </p1510:revInfo>
 </file>
@@ -151,7 +152,7 @@
   <pc:docChgLst>
     <pc:chgData name="Samir Ahmad" userId="6526cdfd-9e5d-4db2-a249-906aad8dcaed" providerId="ADAL" clId="{DD1E3162-E580-42E7-9F1F-010E02DB6D1C}"/>
     <pc:docChg chg="undo redo custSel addSld delSld modSld sldOrd">
-      <pc:chgData name="Samir Ahmad" userId="6526cdfd-9e5d-4db2-a249-906aad8dcaed" providerId="ADAL" clId="{DD1E3162-E580-42E7-9F1F-010E02DB6D1C}" dt="2026-03-23T14:21:50.392" v="245" actId="26606"/>
+      <pc:chgData name="Samir Ahmad" userId="6526cdfd-9e5d-4db2-a249-906aad8dcaed" providerId="ADAL" clId="{DD1E3162-E580-42E7-9F1F-010E02DB6D1C}" dt="2026-03-24T08:27:11.060" v="358" actId="1076"/>
       <pc:docMkLst>
         <pc:docMk/>
       </pc:docMkLst>
@@ -722,6 +723,77 @@
           <pc:sldMk cId="4100401480" sldId="266"/>
         </pc:sldMkLst>
       </pc:sldChg>
+      <pc:sldChg chg="addSp delSp modSp add mod">
+        <pc:chgData name="Samir Ahmad" userId="6526cdfd-9e5d-4db2-a249-906aad8dcaed" providerId="ADAL" clId="{DD1E3162-E580-42E7-9F1F-010E02DB6D1C}" dt="2026-03-24T08:27:11.060" v="358" actId="1076"/>
+        <pc:sldMkLst>
+          <pc:docMk/>
+          <pc:sldMk cId="1202611194" sldId="267"/>
+        </pc:sldMkLst>
+        <pc:spChg chg="del">
+          <ac:chgData name="Samir Ahmad" userId="6526cdfd-9e5d-4db2-a249-906aad8dcaed" providerId="ADAL" clId="{DD1E3162-E580-42E7-9F1F-010E02DB6D1C}" dt="2026-03-24T08:20:29.665" v="247" actId="478"/>
+          <ac:spMkLst>
+            <pc:docMk/>
+            <pc:sldMk cId="1202611194" sldId="267"/>
+            <ac:spMk id="3" creationId="{E0CA78A4-DC2D-FD12-4611-4CCEAB8B5E07}"/>
+          </ac:spMkLst>
+        </pc:spChg>
+        <pc:spChg chg="mod">
+          <ac:chgData name="Samir Ahmad" userId="6526cdfd-9e5d-4db2-a249-906aad8dcaed" providerId="ADAL" clId="{DD1E3162-E580-42E7-9F1F-010E02DB6D1C}" dt="2026-03-24T08:23:00.301" v="330" actId="404"/>
+          <ac:spMkLst>
+            <pc:docMk/>
+            <pc:sldMk cId="1202611194" sldId="267"/>
+            <ac:spMk id="4" creationId="{4AA0D17F-C3C7-0970-64FF-81BAD7D61C19}"/>
+          </ac:spMkLst>
+        </pc:spChg>
+        <pc:spChg chg="add del mod">
+          <ac:chgData name="Samir Ahmad" userId="6526cdfd-9e5d-4db2-a249-906aad8dcaed" providerId="ADAL" clId="{DD1E3162-E580-42E7-9F1F-010E02DB6D1C}" dt="2026-03-24T08:20:33.806" v="248" actId="478"/>
+          <ac:spMkLst>
+            <pc:docMk/>
+            <pc:sldMk cId="1202611194" sldId="267"/>
+            <ac:spMk id="5" creationId="{E8EDA237-6EE0-9F6B-3C37-972CD4F3E1BA}"/>
+          </ac:spMkLst>
+        </pc:spChg>
+        <pc:spChg chg="add mod">
+          <ac:chgData name="Samir Ahmad" userId="6526cdfd-9e5d-4db2-a249-906aad8dcaed" providerId="ADAL" clId="{DD1E3162-E580-42E7-9F1F-010E02DB6D1C}" dt="2026-03-24T08:22:58.438" v="329" actId="403"/>
+          <ac:spMkLst>
+            <pc:docMk/>
+            <pc:sldMk cId="1202611194" sldId="267"/>
+            <ac:spMk id="7" creationId="{65F1A23C-384F-3988-C63F-CE5F1150448E}"/>
+          </ac:spMkLst>
+        </pc:spChg>
+        <pc:picChg chg="add mod">
+          <ac:chgData name="Samir Ahmad" userId="6526cdfd-9e5d-4db2-a249-906aad8dcaed" providerId="ADAL" clId="{DD1E3162-E580-42E7-9F1F-010E02DB6D1C}" dt="2026-03-24T08:27:11.060" v="358" actId="1076"/>
+          <ac:picMkLst>
+            <pc:docMk/>
+            <pc:sldMk cId="1202611194" sldId="267"/>
+            <ac:picMk id="9" creationId="{2A0963F7-056F-0E16-13A9-60B3F5AE83CF}"/>
+          </ac:picMkLst>
+        </pc:picChg>
+        <pc:picChg chg="add mod">
+          <ac:chgData name="Samir Ahmad" userId="6526cdfd-9e5d-4db2-a249-906aad8dcaed" providerId="ADAL" clId="{DD1E3162-E580-42E7-9F1F-010E02DB6D1C}" dt="2026-03-24T08:27:06.344" v="357" actId="1076"/>
+          <ac:picMkLst>
+            <pc:docMk/>
+            <pc:sldMk cId="1202611194" sldId="267"/>
+            <ac:picMk id="11" creationId="{7FED6E05-76D2-712E-7C37-EDD2FE65C637}"/>
+          </ac:picMkLst>
+        </pc:picChg>
+        <pc:picChg chg="add del mod">
+          <ac:chgData name="Samir Ahmad" userId="6526cdfd-9e5d-4db2-a249-906aad8dcaed" providerId="ADAL" clId="{DD1E3162-E580-42E7-9F1F-010E02DB6D1C}" dt="2026-03-24T08:26:22.088" v="349" actId="478"/>
+          <ac:picMkLst>
+            <pc:docMk/>
+            <pc:sldMk cId="1202611194" sldId="267"/>
+            <ac:picMk id="13" creationId="{143F3B6D-2B2B-0F88-B064-5E8DBEAEE477}"/>
+          </ac:picMkLst>
+        </pc:picChg>
+        <pc:picChg chg="add del mod">
+          <ac:chgData name="Samir Ahmad" userId="6526cdfd-9e5d-4db2-a249-906aad8dcaed" providerId="ADAL" clId="{DD1E3162-E580-42E7-9F1F-010E02DB6D1C}" dt="2026-03-24T08:27:02.125" v="356" actId="478"/>
+          <ac:picMkLst>
+            <pc:docMk/>
+            <pc:sldMk cId="1202611194" sldId="267"/>
+            <ac:picMk id="15" creationId="{75D465AE-A22E-1870-CE9F-4C0C854D842A}"/>
+          </ac:picMkLst>
+        </pc:picChg>
+      </pc:sldChg>
     </pc:docChg>
   </pc:docChgLst>
 </pc:chgInfo>
@@ -778,7 +850,7 @@
           <a:p>
             <a:fld id="{7ECECBB8-93AA-FA41-A054-EC9AB38F47E2}" type="datetimeFigureOut">
               <a:rPr lang="en-US" sz="1000" smtClean="0"/>
-              <a:t>3/23/2026</a:t>
+              <a:t>3/24/2026</a:t>
             </a:fld>
             <a:endParaRPr lang="sv-SE" sz="1000"/>
           </a:p>
@@ -1055,7 +1127,7 @@
           <a:p>
             <a:fld id="{7ECECBB8-93AA-FA41-A054-EC9AB38F47E2}" type="datetimeFigureOut">
               <a:rPr lang="en-US" sz="1000" smtClean="0"/>
-              <a:t>3/23/2026</a:t>
+              <a:t>3/24/2026</a:t>
             </a:fld>
             <a:endParaRPr lang="sv-SE" sz="1000"/>
           </a:p>
@@ -2865,7 +2937,7 @@
           <a:p>
             <a:fld id="{0601DF77-84AF-42BB-B24D-D58989A766F1}" type="slidenum">
               <a:rPr lang="sv-SE" sz="1000" smtClean="0"/>
-              <a:t>4</a:t>
+              <a:t>5</a:t>
             </a:fld>
             <a:endParaRPr lang="sv-SE" sz="1000"/>
           </a:p>
@@ -5004,7 +5076,7 @@
           <a:p>
             <a:fld id="{0601DF77-84AF-42BB-B24D-D58989A766F1}" type="slidenum">
               <a:rPr lang="sv-SE" sz="1000" smtClean="0"/>
-              <a:t>6</a:t>
+              <a:t>7</a:t>
             </a:fld>
             <a:endParaRPr lang="sv-SE" sz="1000"/>
           </a:p>
@@ -5274,7 +5346,7 @@
             <a:fld id="{9F36A944-98E7-4C32-ABD0-39B1C9C7C273}" type="datetimeFigureOut">
               <a:rPr lang="sv-SE" smtClean="0"/>
               <a:pPr/>
-              <a:t>2026-03-23</a:t>
+              <a:t>2026-03-24</a:t>
             </a:fld>
             <a:endParaRPr lang="sv-SE"/>
           </a:p>
@@ -5524,7 +5596,7 @@
             <a:fld id="{9F36A944-98E7-4C32-ABD0-39B1C9C7C273}" type="datetimeFigureOut">
               <a:rPr lang="sv-SE" smtClean="0"/>
               <a:pPr/>
-              <a:t>2026-03-23</a:t>
+              <a:t>2026-03-24</a:t>
             </a:fld>
             <a:endParaRPr lang="sv-SE"/>
           </a:p>
@@ -5842,7 +5914,7 @@
             <a:fld id="{9F36A944-98E7-4C32-ABD0-39B1C9C7C273}" type="datetimeFigureOut">
               <a:rPr lang="sv-SE" smtClean="0"/>
               <a:pPr/>
-              <a:t>2026-03-23</a:t>
+              <a:t>2026-03-24</a:t>
             </a:fld>
             <a:endParaRPr lang="sv-SE"/>
           </a:p>
@@ -6005,7 +6077,7 @@
             <a:fld id="{9F36A944-98E7-4C32-ABD0-39B1C9C7C273}" type="datetimeFigureOut">
               <a:rPr lang="sv-SE" smtClean="0"/>
               <a:pPr/>
-              <a:t>2026-03-23</a:t>
+              <a:t>2026-03-24</a:t>
             </a:fld>
             <a:endParaRPr lang="sv-SE"/>
           </a:p>
@@ -6958,7 +7030,7 @@
             <a:fld id="{9F36A944-98E7-4C32-ABD0-39B1C9C7C273}" type="datetimeFigureOut">
               <a:rPr lang="sv-SE" smtClean="0"/>
               <a:pPr/>
-              <a:t>2026-03-23</a:t>
+              <a:t>2026-03-24</a:t>
             </a:fld>
             <a:endParaRPr lang="sv-SE"/>
           </a:p>
@@ -7492,7 +7564,7 @@
             <a:fld id="{9F36A944-98E7-4C32-ABD0-39B1C9C7C273}" type="datetimeFigureOut">
               <a:rPr lang="sv-SE" smtClean="0"/>
               <a:pPr/>
-              <a:t>2026-03-23</a:t>
+              <a:t>2026-03-24</a:t>
             </a:fld>
             <a:endParaRPr lang="sv-SE"/>
           </a:p>
@@ -7958,7 +8030,7 @@
             <a:fld id="{9F36A944-98E7-4C32-ABD0-39B1C9C7C273}" type="datetimeFigureOut">
               <a:rPr lang="sv-SE" smtClean="0"/>
               <a:pPr/>
-              <a:t>2026-03-23</a:t>
+              <a:t>2026-03-24</a:t>
             </a:fld>
             <a:endParaRPr lang="sv-SE"/>
           </a:p>
@@ -8503,7 +8575,7 @@
             <a:fld id="{9F36A944-98E7-4C32-ABD0-39B1C9C7C273}" type="datetimeFigureOut">
               <a:rPr lang="sv-SE" smtClean="0"/>
               <a:pPr/>
-              <a:t>2026-03-23</a:t>
+              <a:t>2026-03-24</a:t>
             </a:fld>
             <a:endParaRPr lang="sv-SE"/>
           </a:p>
@@ -8871,7 +8943,7 @@
             <a:fld id="{9F36A944-98E7-4C32-ABD0-39B1C9C7C273}" type="datetimeFigureOut">
               <a:rPr lang="sv-SE" smtClean="0"/>
               <a:pPr/>
-              <a:t>2026-03-23</a:t>
+              <a:t>2026-03-24</a:t>
             </a:fld>
             <a:endParaRPr lang="sv-SE"/>
           </a:p>
@@ -9413,7 +9485,7 @@
             <a:fld id="{9F36A944-98E7-4C32-ABD0-39B1C9C7C273}" type="datetimeFigureOut">
               <a:rPr lang="sv-SE" smtClean="0"/>
               <a:pPr/>
-              <a:t>2026-03-23</a:t>
+              <a:t>2026-03-24</a:t>
             </a:fld>
             <a:endParaRPr lang="sv-SE"/>
           </a:p>
@@ -9775,7 +9847,7 @@
             <a:fld id="{9F36A944-98E7-4C32-ABD0-39B1C9C7C273}" type="datetimeFigureOut">
               <a:rPr lang="sv-SE" smtClean="0"/>
               <a:pPr/>
-              <a:t>2026-03-23</a:t>
+              <a:t>2026-03-24</a:t>
             </a:fld>
             <a:endParaRPr lang="sv-SE"/>
           </a:p>
@@ -9975,7 +10047,7 @@
             <a:fld id="{9F36A944-98E7-4C32-ABD0-39B1C9C7C273}" type="datetimeFigureOut">
               <a:rPr lang="sv-SE" smtClean="0"/>
               <a:pPr/>
-              <a:t>2026-03-23</a:t>
+              <a:t>2026-03-24</a:t>
             </a:fld>
             <a:endParaRPr lang="sv-SE"/>
           </a:p>
@@ -10252,7 +10324,7 @@
             <a:fld id="{9F36A944-98E7-4C32-ABD0-39B1C9C7C273}" type="datetimeFigureOut">
               <a:rPr lang="sv-SE" smtClean="0"/>
               <a:pPr/>
-              <a:t>2026-03-23</a:t>
+              <a:t>2026-03-24</a:t>
             </a:fld>
             <a:endParaRPr lang="sv-SE"/>
           </a:p>
@@ -10519,7 +10591,7 @@
             <a:fld id="{9F36A944-98E7-4C32-ABD0-39B1C9C7C273}" type="datetimeFigureOut">
               <a:rPr lang="sv-SE" smtClean="0"/>
               <a:pPr/>
-              <a:t>2026-03-23</a:t>
+              <a:t>2026-03-24</a:t>
             </a:fld>
             <a:endParaRPr lang="sv-SE"/>
           </a:p>
@@ -10933,7 +11005,7 @@
             <a:fld id="{9F36A944-98E7-4C32-ABD0-39B1C9C7C273}" type="datetimeFigureOut">
               <a:rPr lang="sv-SE" smtClean="0"/>
               <a:pPr/>
-              <a:t>2026-03-23</a:t>
+              <a:t>2026-03-24</a:t>
             </a:fld>
             <a:endParaRPr lang="sv-SE"/>
           </a:p>
@@ -11076,7 +11148,7 @@
             <a:fld id="{9F36A944-98E7-4C32-ABD0-39B1C9C7C273}" type="datetimeFigureOut">
               <a:rPr lang="sv-SE" smtClean="0"/>
               <a:pPr/>
-              <a:t>2026-03-23</a:t>
+              <a:t>2026-03-24</a:t>
             </a:fld>
             <a:endParaRPr lang="sv-SE"/>
           </a:p>
@@ -11191,7 +11263,7 @@
             <a:fld id="{9F36A944-98E7-4C32-ABD0-39B1C9C7C273}" type="datetimeFigureOut">
               <a:rPr lang="sv-SE" smtClean="0"/>
               <a:pPr/>
-              <a:t>2026-03-23</a:t>
+              <a:t>2026-03-24</a:t>
             </a:fld>
             <a:endParaRPr lang="sv-SE"/>
           </a:p>
@@ -11504,7 +11576,7 @@
             <a:fld id="{9F36A944-98E7-4C32-ABD0-39B1C9C7C273}" type="datetimeFigureOut">
               <a:rPr lang="sv-SE" smtClean="0"/>
               <a:pPr/>
-              <a:t>2026-03-23</a:t>
+              <a:t>2026-03-24</a:t>
             </a:fld>
             <a:endParaRPr lang="sv-SE"/>
           </a:p>
@@ -11794,7 +11866,7 @@
             <a:fld id="{9F36A944-98E7-4C32-ABD0-39B1C9C7C273}" type="datetimeFigureOut">
               <a:rPr lang="sv-SE" smtClean="0"/>
               <a:pPr/>
-              <a:t>2026-03-23</a:t>
+              <a:t>2026-03-24</a:t>
             </a:fld>
             <a:endParaRPr lang="sv-SE"/>
           </a:p>
@@ -12070,7 +12142,7 @@
             <a:fld id="{9F36A944-98E7-4C32-ABD0-39B1C9C7C273}" type="datetimeFigureOut">
               <a:rPr lang="sv-SE" smtClean="0"/>
               <a:pPr/>
-              <a:t>2026-03-23</a:t>
+              <a:t>2026-03-24</a:t>
             </a:fld>
             <a:endParaRPr lang="sv-SE"/>
           </a:p>
@@ -12302,7 +12374,7 @@
             <a:fld id="{9F36A944-98E7-4C32-ABD0-39B1C9C7C273}" type="datetimeFigureOut">
               <a:rPr lang="sv-SE" smtClean="0"/>
               <a:pPr/>
-              <a:t>2026-03-23</a:t>
+              <a:t>2026-03-24</a:t>
             </a:fld>
             <a:endParaRPr lang="sv-SE"/>
           </a:p>
@@ -12512,7 +12584,7 @@
             <a:fld id="{9F36A944-98E7-4C32-ABD0-39B1C9C7C273}" type="datetimeFigureOut">
               <a:rPr lang="sv-SE" smtClean="0"/>
               <a:pPr/>
-              <a:t>2026-03-23</a:t>
+              <a:t>2026-03-24</a:t>
             </a:fld>
             <a:endParaRPr lang="sv-SE"/>
           </a:p>
@@ -12837,7 +12909,7 @@
             <a:fld id="{9F36A944-98E7-4C32-ABD0-39B1C9C7C273}" type="datetimeFigureOut">
               <a:rPr lang="sv-SE" smtClean="0"/>
               <a:pPr/>
-              <a:t>2026-03-23</a:t>
+              <a:t>2026-03-24</a:t>
             </a:fld>
             <a:endParaRPr lang="sv-SE"/>
           </a:p>
@@ -13240,7 +13312,7 @@
             <a:fld id="{9F36A944-98E7-4C32-ABD0-39B1C9C7C273}" type="datetimeFigureOut">
               <a:rPr lang="sv-SE" smtClean="0"/>
               <a:pPr/>
-              <a:t>2026-03-23</a:t>
+              <a:t>2026-03-24</a:t>
             </a:fld>
             <a:endParaRPr lang="sv-SE"/>
           </a:p>
@@ -13802,7 +13874,7 @@
             <a:fld id="{9F36A944-98E7-4C32-ABD0-39B1C9C7C273}" type="datetimeFigureOut">
               <a:rPr lang="sv-SE" smtClean="0"/>
               <a:pPr/>
-              <a:t>2026-03-23</a:t>
+              <a:t>2026-03-24</a:t>
             </a:fld>
             <a:endParaRPr lang="sv-SE"/>
           </a:p>
@@ -14110,7 +14182,7 @@
             <a:fld id="{9F36A944-98E7-4C32-ABD0-39B1C9C7C273}" type="datetimeFigureOut">
               <a:rPr lang="sv-SE" smtClean="0"/>
               <a:pPr/>
-              <a:t>2026-03-23</a:t>
+              <a:t>2026-03-24</a:t>
             </a:fld>
             <a:endParaRPr lang="sv-SE"/>
           </a:p>
@@ -14566,7 +14638,7 @@
             <a:fld id="{9F36A944-98E7-4C32-ABD0-39B1C9C7C273}" type="datetimeFigureOut">
               <a:rPr lang="sv-SE" smtClean="0"/>
               <a:pPr/>
-              <a:t>2026-03-23</a:t>
+              <a:t>2026-03-24</a:t>
             </a:fld>
             <a:endParaRPr lang="sv-SE"/>
           </a:p>
@@ -14964,7 +15036,7 @@
             <a:fld id="{9F36A944-98E7-4C32-ABD0-39B1C9C7C273}" type="datetimeFigureOut">
               <a:rPr lang="sv-SE" smtClean="0"/>
               <a:pPr/>
-              <a:t>2026-03-23</a:t>
+              <a:t>2026-03-24</a:t>
             </a:fld>
             <a:endParaRPr lang="sv-SE"/>
           </a:p>
@@ -15526,7 +15598,7 @@
             <a:fld id="{9F36A944-98E7-4C32-ABD0-39B1C9C7C273}" type="datetimeFigureOut">
               <a:rPr lang="sv-SE" smtClean="0"/>
               <a:pPr/>
-              <a:t>2026-03-23</a:t>
+              <a:t>2026-03-24</a:t>
             </a:fld>
             <a:endParaRPr lang="sv-SE"/>
           </a:p>
@@ -15982,7 +16054,7 @@
             <a:fld id="{9F36A944-98E7-4C32-ABD0-39B1C9C7C273}" type="datetimeFigureOut">
               <a:rPr lang="sv-SE" smtClean="0"/>
               <a:pPr/>
-              <a:t>2026-03-23</a:t>
+              <a:t>2026-03-24</a:t>
             </a:fld>
             <a:endParaRPr lang="sv-SE"/>
           </a:p>
@@ -16385,7 +16457,7 @@
             <a:fld id="{9F36A944-98E7-4C32-ABD0-39B1C9C7C273}" type="datetimeFigureOut">
               <a:rPr lang="sv-SE" smtClean="0"/>
               <a:pPr/>
-              <a:t>2026-03-23</a:t>
+              <a:t>2026-03-24</a:t>
             </a:fld>
             <a:endParaRPr lang="sv-SE"/>
           </a:p>
@@ -16656,7 +16728,7 @@
             <a:fld id="{9F36A944-98E7-4C32-ABD0-39B1C9C7C273}" type="datetimeFigureOut">
               <a:rPr lang="sv-SE" smtClean="0"/>
               <a:pPr/>
-              <a:t>2026-03-23</a:t>
+              <a:t>2026-03-24</a:t>
             </a:fld>
             <a:endParaRPr lang="sv-SE"/>
           </a:p>
@@ -17628,7 +17700,7 @@
             <a:fld id="{9F36A944-98E7-4C32-ABD0-39B1C9C7C273}" type="datetimeFigureOut">
               <a:rPr lang="sv-SE" smtClean="0"/>
               <a:pPr/>
-              <a:t>2026-03-23</a:t>
+              <a:t>2026-03-24</a:t>
             </a:fld>
             <a:endParaRPr lang="sv-SE"/>
           </a:p>
@@ -18327,6 +18399,349 @@
   <p:cSld>
     <p:spTree>
       <p:nvGrpSpPr>
+        <p:cNvPr id="1" name="">
+          <a:extLst>
+            <a:ext uri="{FF2B5EF4-FFF2-40B4-BE49-F238E27FC236}">
+              <a16:creationId xmlns:a16="http://schemas.microsoft.com/office/drawing/2014/main" id="{DC72ED2D-2292-65BB-CE07-FDC5CD74C89D}"/>
+            </a:ext>
+          </a:extLst>
+        </p:cNvPr>
+        <p:cNvGrpSpPr/>
+        <p:nvPr/>
+      </p:nvGrpSpPr>
+      <p:grpSpPr>
+        <a:xfrm>
+          <a:off x="0" y="0"/>
+          <a:ext cx="0" cy="0"/>
+          <a:chOff x="0" y="0"/>
+          <a:chExt cx="0" cy="0"/>
+        </a:xfrm>
+      </p:grpSpPr>
+      <p:sp>
+        <p:nvSpPr>
+          <p:cNvPr id="4" name="Platshållare för text 3">
+            <a:extLst>
+              <a:ext uri="{FF2B5EF4-FFF2-40B4-BE49-F238E27FC236}">
+                <a16:creationId xmlns:a16="http://schemas.microsoft.com/office/drawing/2014/main" id="{4AA0D17F-C3C7-0970-64FF-81BAD7D61C19}"/>
+              </a:ext>
+            </a:extLst>
+          </p:cNvPr>
+          <p:cNvSpPr>
+            <a:spLocks noGrp="1"/>
+          </p:cNvSpPr>
+          <p:nvPr>
+            <p:ph type="body" idx="1"/>
+          </p:nvPr>
+        </p:nvSpPr>
+        <p:spPr>
+          <a:xfrm>
+            <a:off x="585479" y="1359460"/>
+            <a:ext cx="10722272" cy="2140258"/>
+          </a:xfrm>
+        </p:spPr>
+        <p:txBody>
+          <a:bodyPr lIns="91440" tIns="45720" rIns="91440" bIns="45720">
+            <a:noAutofit/>
+          </a:bodyPr>
+          <a:lstStyle/>
+          <a:p>
+            <a:pPr marL="457200" indent="-457200">
+              <a:buFont typeface="Arial" panose="020B0604020202020204" pitchFamily="34" charset="0"/>
+              <a:buChar char="•"/>
+            </a:pPr>
+            <a:r>
+              <a:rPr lang="en-US" dirty="0">
+                <a:solidFill>
+                  <a:schemeClr val="tx1"/>
+                </a:solidFill>
+                <a:latin typeface="Abadi" panose="020F0502020204030204" pitchFamily="34" charset="0"/>
+                <a:cs typeface="Calibri"/>
+              </a:rPr>
+              <a:t>Om </a:t>
+            </a:r>
+            <a:r>
+              <a:rPr lang="en-US" dirty="0" err="1">
+                <a:solidFill>
+                  <a:schemeClr val="tx1"/>
+                </a:solidFill>
+                <a:latin typeface="Abadi" panose="020F0502020204030204" pitchFamily="34" charset="0"/>
+                <a:cs typeface="Calibri"/>
+              </a:rPr>
+              <a:t>oss</a:t>
+            </a:r>
+            <a:endParaRPr lang="en-US" dirty="0">
+              <a:solidFill>
+                <a:schemeClr val="tx1"/>
+              </a:solidFill>
+              <a:latin typeface="Abadi" panose="020F0502020204030204" pitchFamily="34" charset="0"/>
+              <a:cs typeface="Calibri"/>
+            </a:endParaRPr>
+          </a:p>
+          <a:p>
+            <a:pPr marL="457200" indent="-457200">
+              <a:buFont typeface="Arial" panose="020B0604020202020204" pitchFamily="34" charset="0"/>
+              <a:buChar char="•"/>
+            </a:pPr>
+            <a:r>
+              <a:rPr lang="sv-SE" dirty="0">
+                <a:solidFill>
+                  <a:schemeClr val="tx1"/>
+                </a:solidFill>
+                <a:latin typeface="Abadi" panose="020F0502020204030204" pitchFamily="34" charset="0"/>
+              </a:rPr>
+              <a:t>Projektbeskrivning</a:t>
+            </a:r>
+          </a:p>
+          <a:p>
+            <a:pPr marL="457200" indent="-457200">
+              <a:buFont typeface="Arial" panose="020B0604020202020204" pitchFamily="34" charset="0"/>
+              <a:buChar char="•"/>
+            </a:pPr>
+            <a:r>
+              <a:rPr lang="sv-SE" dirty="0">
+                <a:solidFill>
+                  <a:schemeClr val="tx1"/>
+                </a:solidFill>
+                <a:latin typeface="Abadi" panose="020F0502020204030204" pitchFamily="34" charset="0"/>
+              </a:rPr>
+              <a:t>Systemlösning</a:t>
+            </a:r>
+          </a:p>
+          <a:p>
+            <a:pPr marL="457200" indent="-457200">
+              <a:buFont typeface="Arial" panose="020B0604020202020204" pitchFamily="34" charset="0"/>
+              <a:buChar char="•"/>
+            </a:pPr>
+            <a:r>
+              <a:rPr lang="en-US" dirty="0" err="1">
+                <a:solidFill>
+                  <a:schemeClr val="tx1"/>
+                </a:solidFill>
+                <a:latin typeface="Abadi" panose="020F0502020204030204" pitchFamily="34" charset="0"/>
+              </a:rPr>
+              <a:t>Tekniska</a:t>
+            </a:r>
+            <a:r>
+              <a:rPr lang="en-US" cap="all" dirty="0">
+                <a:solidFill>
+                  <a:schemeClr val="tx1"/>
+                </a:solidFill>
+                <a:latin typeface="Abadi" panose="020F0502020204030204" pitchFamily="34" charset="0"/>
+              </a:rPr>
+              <a:t> </a:t>
+            </a:r>
+            <a:r>
+              <a:rPr lang="en-US" dirty="0" err="1">
+                <a:solidFill>
+                  <a:schemeClr val="tx1"/>
+                </a:solidFill>
+                <a:latin typeface="Abadi" panose="020F0502020204030204" pitchFamily="34" charset="0"/>
+              </a:rPr>
+              <a:t>detaljer</a:t>
+            </a:r>
+            <a:endParaRPr lang="en-US" dirty="0">
+              <a:solidFill>
+                <a:schemeClr val="tx1"/>
+              </a:solidFill>
+              <a:latin typeface="Abadi" panose="020F0502020204030204" pitchFamily="34" charset="0"/>
+            </a:endParaRPr>
+          </a:p>
+          <a:p>
+            <a:pPr marL="457200" indent="-457200">
+              <a:buFont typeface="Arial" panose="020B0604020202020204" pitchFamily="34" charset="0"/>
+              <a:buChar char="•"/>
+            </a:pPr>
+            <a:r>
+              <a:rPr lang="en-US" dirty="0" err="1">
+                <a:solidFill>
+                  <a:schemeClr val="tx1"/>
+                </a:solidFill>
+                <a:latin typeface="Abadi" panose="020F0502020204030204" pitchFamily="34" charset="0"/>
+              </a:rPr>
+              <a:t>Projektdemo</a:t>
+            </a:r>
+            <a:endParaRPr lang="en-US" dirty="0">
+              <a:solidFill>
+                <a:schemeClr val="tx1"/>
+              </a:solidFill>
+              <a:latin typeface="Abadi" panose="020F0502020204030204" pitchFamily="34" charset="0"/>
+            </a:endParaRPr>
+          </a:p>
+          <a:p>
+            <a:pPr marL="457200" indent="-457200">
+              <a:buFont typeface="Arial" panose="020B0604020202020204" pitchFamily="34" charset="0"/>
+              <a:buChar char="•"/>
+            </a:pPr>
+            <a:r>
+              <a:rPr lang="en-US" dirty="0" err="1">
+                <a:solidFill>
+                  <a:schemeClr val="tx1"/>
+                </a:solidFill>
+                <a:latin typeface="Abadi" panose="020F0502020204030204" pitchFamily="34" charset="0"/>
+              </a:rPr>
+              <a:t>Refelektion</a:t>
+            </a:r>
+            <a:endParaRPr lang="en-US" dirty="0">
+              <a:solidFill>
+                <a:schemeClr val="tx1"/>
+              </a:solidFill>
+              <a:latin typeface="Abadi" panose="020F0502020204030204" pitchFamily="34" charset="0"/>
+            </a:endParaRPr>
+          </a:p>
+          <a:p>
+            <a:pPr marL="457200" indent="-457200">
+              <a:buFont typeface="Arial" panose="020B0604020202020204" pitchFamily="34" charset="0"/>
+              <a:buChar char="•"/>
+            </a:pPr>
+            <a:endParaRPr lang="sv-SE" dirty="0">
+              <a:solidFill>
+                <a:schemeClr val="tx1"/>
+              </a:solidFill>
+              <a:latin typeface="Abadi" panose="020F0502020204030204" pitchFamily="34" charset="0"/>
+            </a:endParaRPr>
+          </a:p>
+          <a:p>
+            <a:pPr marL="457200" indent="-457200">
+              <a:buFont typeface="Arial" panose="020B0604020202020204" pitchFamily="34" charset="0"/>
+              <a:buChar char="•"/>
+            </a:pPr>
+            <a:endParaRPr lang="sv-SE" dirty="0">
+              <a:solidFill>
+                <a:schemeClr val="tx1"/>
+              </a:solidFill>
+              <a:latin typeface="Abadi" panose="020F0502020204030204" pitchFamily="34" charset="0"/>
+            </a:endParaRPr>
+          </a:p>
+        </p:txBody>
+      </p:sp>
+      <p:sp>
+        <p:nvSpPr>
+          <p:cNvPr id="7" name="textruta 6">
+            <a:extLst>
+              <a:ext uri="{FF2B5EF4-FFF2-40B4-BE49-F238E27FC236}">
+                <a16:creationId xmlns:a16="http://schemas.microsoft.com/office/drawing/2014/main" id="{65F1A23C-384F-3988-C63F-CE5F1150448E}"/>
+              </a:ext>
+            </a:extLst>
+          </p:cNvPr>
+          <p:cNvSpPr txBox="1"/>
+          <p:nvPr/>
+        </p:nvSpPr>
+        <p:spPr>
+          <a:xfrm>
+            <a:off x="738428" y="384368"/>
+            <a:ext cx="6094902" cy="646331"/>
+          </a:xfrm>
+          <a:prstGeom prst="rect">
+            <a:avLst/>
+          </a:prstGeom>
+          <a:noFill/>
+        </p:spPr>
+        <p:txBody>
+          <a:bodyPr wrap="square">
+            <a:spAutoFit/>
+          </a:bodyPr>
+          <a:lstStyle/>
+          <a:p>
+            <a:r>
+              <a:rPr lang="en-US" sz="3600" dirty="0">
+                <a:solidFill>
+                  <a:schemeClr val="accent1"/>
+                </a:solidFill>
+                <a:latin typeface="+mj-lt"/>
+                <a:ea typeface="+mj-ea"/>
+                <a:cs typeface="Arial" panose="020B0604020202020204" pitchFamily="34" charset="0"/>
+              </a:rPr>
+              <a:t>Agenda</a:t>
+            </a:r>
+            <a:endParaRPr lang="sv-SE" sz="3600" dirty="0">
+              <a:solidFill>
+                <a:schemeClr val="accent1"/>
+              </a:solidFill>
+              <a:latin typeface="+mj-lt"/>
+              <a:ea typeface="+mj-ea"/>
+              <a:cs typeface="Arial" panose="020B0604020202020204" pitchFamily="34" charset="0"/>
+            </a:endParaRPr>
+          </a:p>
+        </p:txBody>
+      </p:sp>
+      <p:pic>
+        <p:nvPicPr>
+          <p:cNvPr id="9" name="Bildobjekt 8">
+            <a:extLst>
+              <a:ext uri="{FF2B5EF4-FFF2-40B4-BE49-F238E27FC236}">
+                <a16:creationId xmlns:a16="http://schemas.microsoft.com/office/drawing/2014/main" id="{2A0963F7-056F-0E16-13A9-60B3F5AE83CF}"/>
+              </a:ext>
+            </a:extLst>
+          </p:cNvPr>
+          <p:cNvPicPr>
+            <a:picLocks noChangeAspect="1"/>
+          </p:cNvPicPr>
+          <p:nvPr/>
+        </p:nvPicPr>
+        <p:blipFill>
+          <a:blip r:embed="rId2"/>
+          <a:stretch>
+            <a:fillRect/>
+          </a:stretch>
+        </p:blipFill>
+        <p:spPr>
+          <a:xfrm>
+            <a:off x="3785879" y="0"/>
+            <a:ext cx="5495171" cy="6335016"/>
+          </a:xfrm>
+          <a:prstGeom prst="rect">
+            <a:avLst/>
+          </a:prstGeom>
+        </p:spPr>
+      </p:pic>
+      <p:pic>
+        <p:nvPicPr>
+          <p:cNvPr id="11" name="Bildobjekt 10">
+            <a:extLst>
+              <a:ext uri="{FF2B5EF4-FFF2-40B4-BE49-F238E27FC236}">
+                <a16:creationId xmlns:a16="http://schemas.microsoft.com/office/drawing/2014/main" id="{7FED6E05-76D2-712E-7C37-EDD2FE65C637}"/>
+              </a:ext>
+            </a:extLst>
+          </p:cNvPr>
+          <p:cNvPicPr>
+            <a:picLocks noChangeAspect="1"/>
+          </p:cNvPicPr>
+          <p:nvPr/>
+        </p:nvPicPr>
+        <p:blipFill>
+          <a:blip r:embed="rId3"/>
+          <a:stretch>
+            <a:fillRect/>
+          </a:stretch>
+        </p:blipFill>
+        <p:spPr>
+          <a:xfrm>
+            <a:off x="5847706" y="0"/>
+            <a:ext cx="6209432" cy="6335016"/>
+          </a:xfrm>
+          <a:prstGeom prst="rect">
+            <a:avLst/>
+          </a:prstGeom>
+        </p:spPr>
+      </p:pic>
+    </p:spTree>
+    <p:extLst>
+      <p:ext uri="{BB962C8B-B14F-4D97-AF65-F5344CB8AC3E}">
+        <p14:creationId xmlns:p14="http://schemas.microsoft.com/office/powerpoint/2010/main" val="1202611194"/>
+      </p:ext>
+    </p:extLst>
+  </p:cSld>
+  <p:clrMapOvr>
+    <a:masterClrMapping/>
+  </p:clrMapOvr>
+</p:sld>
+</file>
+
+<file path=ppt/slides/slide3.xml><?xml version="1.0" encoding="utf-8"?>
+<p:sld xmlns:a="http://schemas.openxmlformats.org/drawingml/2006/main" xmlns:r="http://schemas.openxmlformats.org/officeDocument/2006/relationships" xmlns:p="http://schemas.openxmlformats.org/presentationml/2006/main">
+  <p:cSld>
+    <p:spTree>
+      <p:nvGrpSpPr>
         <p:cNvPr id="1" name=""/>
         <p:cNvGrpSpPr/>
         <p:nvPr/>
@@ -18361,14 +18776,13 @@
           <a:lstStyle/>
           <a:p>
             <a:r>
-              <a:rPr lang="sv-SE" sz="2800"/>
+              <a:rPr lang="sv-SE" sz="2800" dirty="0"/>
               <a:t>Projektbeskrivning</a:t>
             </a:r>
             <a:r>
-              <a:rPr lang="sv-SE"/>
+              <a:rPr lang="sv-SE" dirty="0"/>
               <a:t> </a:t>
             </a:r>
-            <a:endParaRPr lang="sv-SE" dirty="0"/>
           </a:p>
         </p:txBody>
       </p:sp>
@@ -18596,7 +19010,7 @@
 </p:sld>
 </file>
 
-<file path=ppt/slides/slide3.xml><?xml version="1.0" encoding="utf-8"?>
+<file path=ppt/slides/slide4.xml><?xml version="1.0" encoding="utf-8"?>
 <p:sld xmlns:a="http://schemas.openxmlformats.org/drawingml/2006/main" xmlns:r="http://schemas.openxmlformats.org/officeDocument/2006/relationships" xmlns:p="http://schemas.openxmlformats.org/presentationml/2006/main">
   <p:cSld>
     <p:spTree>
@@ -18899,7 +19313,7 @@
 </p:sld>
 </file>
 
-<file path=ppt/slides/slide4.xml><?xml version="1.0" encoding="utf-8"?>
+<file path=ppt/slides/slide5.xml><?xml version="1.0" encoding="utf-8"?>
 <p:sld xmlns:a="http://schemas.openxmlformats.org/drawingml/2006/main" xmlns:r="http://schemas.openxmlformats.org/officeDocument/2006/relationships" xmlns:p="http://schemas.openxmlformats.org/presentationml/2006/main">
   <p:cSld>
     <p:spTree>
@@ -19451,7 +19865,7 @@
 </p:sld>
 </file>
 
-<file path=ppt/slides/slide5.xml><?xml version="1.0" encoding="utf-8"?>
+<file path=ppt/slides/slide6.xml><?xml version="1.0" encoding="utf-8"?>
 <p:sld xmlns:a="http://schemas.openxmlformats.org/drawingml/2006/main" xmlns:r="http://schemas.openxmlformats.org/officeDocument/2006/relationships" xmlns:p="http://schemas.openxmlformats.org/presentationml/2006/main">
   <p:cSld>
     <p:spTree>
@@ -19576,7 +19990,7 @@
 </p:sld>
 </file>
 
-<file path=ppt/slides/slide6.xml><?xml version="1.0" encoding="utf-8"?>
+<file path=ppt/slides/slide7.xml><?xml version="1.0" encoding="utf-8"?>
 <p:sld xmlns:a="http://schemas.openxmlformats.org/drawingml/2006/main" xmlns:r="http://schemas.openxmlformats.org/officeDocument/2006/relationships" xmlns:p="http://schemas.openxmlformats.org/presentationml/2006/main">
   <p:cSld>
     <p:spTree>
@@ -20251,7 +20665,7 @@
 </p:sld>
 </file>
 
-<file path=ppt/slides/slide7.xml><?xml version="1.0" encoding="utf-8"?>
+<file path=ppt/slides/slide8.xml><?xml version="1.0" encoding="utf-8"?>
 <p:sld xmlns:a="http://schemas.openxmlformats.org/drawingml/2006/main" xmlns:r="http://schemas.openxmlformats.org/officeDocument/2006/relationships" xmlns:p="http://schemas.openxmlformats.org/presentationml/2006/main">
   <p:cSld>
     <p:spTree>
@@ -21566,6 +21980,15 @@
 </file>
 
 <file path=customXml/item1.xml><?xml version="1.0" encoding="utf-8"?>
+<?mso-contentType ?>
+<FormTemplates xmlns="http://schemas.microsoft.com/sharepoint/v3/contenttype/forms">
+  <Display>DocumentLibraryForm</Display>
+  <Edit>DocumentLibraryForm</Edit>
+  <New>DocumentLibraryForm</New>
+</FormTemplates>
+</file>
+
+<file path=customXml/item2.xml><?xml version="1.0" encoding="utf-8"?>
 <ct:contentTypeSchema xmlns:ct="http://schemas.microsoft.com/office/2006/metadata/contentType" xmlns:ma="http://schemas.microsoft.com/office/2006/metadata/properties/metaAttributes" ct:_="" ma:_="" ma:contentTypeName="Document" ma:contentTypeID="0x0101002040269B5D0BB84382A84BE8E1E40650" ma:contentTypeVersion="22" ma:contentTypeDescription="Create a new document." ma:contentTypeScope="" ma:versionID="daf369756ef5375cc1980ebde4e3541a">
   <xsd:schema xmlns:xsd="http://www.w3.org/2001/XMLSchema" xmlns:xs="http://www.w3.org/2001/XMLSchema" xmlns:p="http://schemas.microsoft.com/office/2006/metadata/properties" xmlns:ns2="86d88fb5-0b4d-4df7-8ca1-8010dc5f6b71" xmlns:ns3="77cbf028-fa62-42e0-a7a7-1b4aa357e9da" targetNamespace="http://schemas.microsoft.com/office/2006/metadata/properties" ma:root="true" ma:fieldsID="7ceb785885e6032c2337498e3c36f3a2" ns2:_="" ns3:_="">
     <xsd:import namespace="86d88fb5-0b4d-4df7-8ca1-8010dc5f6b71"/>
@@ -21812,15 +22235,6 @@
 </ct:contentTypeSchema>
 </file>
 
-<file path=customXml/item2.xml><?xml version="1.0" encoding="utf-8"?>
-<?mso-contentType ?>
-<FormTemplates xmlns="http://schemas.microsoft.com/sharepoint/v3/contenttype/forms">
-  <Display>DocumentLibraryForm</Display>
-  <Edit>DocumentLibraryForm</Edit>
-  <New>DocumentLibraryForm</New>
-</FormTemplates>
-</file>
-
 <file path=customXml/item3.xml><?xml version="1.0" encoding="utf-8"?>
 <p:properties xmlns:p="http://schemas.microsoft.com/office/2006/metadata/properties" xmlns:xsi="http://www.w3.org/2001/XMLSchema-instance" xmlns:pc="http://schemas.microsoft.com/office/infopath/2007/PartnerControls">
   <documentManagement>
@@ -21853,6 +22267,14 @@
 </file>
 
 <file path=customXml/itemProps1.xml><?xml version="1.0" encoding="utf-8"?>
+<ds:datastoreItem xmlns:ds="http://schemas.openxmlformats.org/officeDocument/2006/customXml" ds:itemID="{61935882-F91E-42B0-B469-BB0995A6E740}">
+  <ds:schemaRefs>
+    <ds:schemaRef ds:uri="http://schemas.microsoft.com/sharepoint/v3/contenttype/forms"/>
+  </ds:schemaRefs>
+</ds:datastoreItem>
+</file>
+
+<file path=customXml/itemProps2.xml><?xml version="1.0" encoding="utf-8"?>
 <ds:datastoreItem xmlns:ds="http://schemas.openxmlformats.org/officeDocument/2006/customXml" ds:itemID="{9B8DDD77-4E93-4E1E-8DC5-9282F1FC9D51}">
   <ds:schemaRefs>
     <ds:schemaRef ds:uri="77cbf028-fa62-42e0-a7a7-1b4aa357e9da"/>
@@ -21867,14 +22289,6 @@
     <ds:schemaRef ds:uri="http://schemas.microsoft.com/office/infopath/2007/PartnerControls"/>
     <ds:schemaRef ds:uri="http://schemas.openxmlformats.org/package/2006/metadata/core-properties"/>
     <ds:schemaRef ds:uri="http://www.w3.org/2001/XMLSchema"/>
-  </ds:schemaRefs>
-</ds:datastoreItem>
-</file>
-
-<file path=customXml/itemProps2.xml><?xml version="1.0" encoding="utf-8"?>
-<ds:datastoreItem xmlns:ds="http://schemas.openxmlformats.org/officeDocument/2006/customXml" ds:itemID="{61935882-F91E-42B0-B469-BB0995A6E740}">
-  <ds:schemaRefs>
-    <ds:schemaRef ds:uri="http://schemas.microsoft.com/sharepoint/v3/contenttype/forms"/>
   </ds:schemaRefs>
 </ds:datastoreItem>
 </file>
